--- a/classes/parte-14-grc-riesgo-y-cumplimiento/282-politicas-estandares-y-procedimientos/clase-282-presentacion.pptx
+++ b/classes/parte-14-grc-riesgo-y-cumplimiento/282-politicas-estandares-y-procedimientos/clase-282-presentacion.pptx
@@ -17,6 +17,10 @@
     <p:sldId id="265" r:id="rId16"/>
     <p:sldId id="266" r:id="rId17"/>
     <p:sldId id="267" r:id="rId18"/>
+    <p:sldId id="268" r:id="rId19"/>
+    <p:sldId id="269" r:id="rId20"/>
+    <p:sldId id="270" r:id="rId21"/>
+    <p:sldId id="271" r:id="rId22"/>
   </p:sldIdLst>
   <p:sldSz cx="9144000" cy="6858000" type="screen4x3"/>
   <p:notesSz cx="6858000" cy="9144000"/>
@@ -3198,7 +3202,7 @@
                   <a:srgbClr val="0B3D2E"/>
                 </a:solidFill>
               </a:rPr>
-              <a:t>⚠️ Errores comunes</a:t>
+              <a:t>🧪 Laboratorio guiado (ejercicio aplicado)</a:t>
             </a:r>
           </a:p>
         </p:txBody>
@@ -3236,67 +3240,97 @@
                   <a:srgbClr val="22282E"/>
                 </a:solidFill>
               </a:rPr>
-              <a:t>•  Política de 20 páginas con detalles técnicos — Mezcla niveles; sube el "cómo" a estándar/procedimiento</a:t>
-            </a:r>
-          </a:p>
-          <a:p>
-            <a:pPr>
-              <a:spcAft>
-                <a:spcPts val="600"/>
-              </a:spcAft>
-            </a:pPr>
-            <a:r>
-              <a:rPr sz="1500">
-                <a:solidFill>
-                  <a:srgbClr val="22282E"/>
-                </a:solidFill>
-              </a:rPr>
-              <a:t>•  Documentos sin propietario ni fecha de revisión — Quedan obsoletos; añade metadatos y ciclo de revisión</a:t>
-            </a:r>
-          </a:p>
-          <a:p>
-            <a:pPr>
-              <a:spcAft>
-                <a:spcPts val="600"/>
-              </a:spcAft>
-            </a:pPr>
-            <a:r>
-              <a:rPr sz="1500">
-                <a:solidFill>
-                  <a:srgbClr val="22282E"/>
-                </a:solidFill>
-              </a:rPr>
-              <a:t>•  Nadie sigue el procedimiento — No es reproducible o no se comunicó; simplifica y forma</a:t>
-            </a:r>
-          </a:p>
-          <a:p>
-            <a:pPr>
-              <a:spcAft>
-                <a:spcPts val="600"/>
-              </a:spcAft>
-            </a:pPr>
-            <a:r>
-              <a:rPr sz="1500">
-                <a:solidFill>
-                  <a:srgbClr val="22282E"/>
-                </a:solidFill>
-              </a:rPr>
-              <a:t>•  Excepciones permanentes — Contradicen la política; ponles caducidad y revisión</a:t>
-            </a:r>
-          </a:p>
-          <a:p>
-            <a:pPr>
-              <a:spcAft>
-                <a:spcPts val="600"/>
-              </a:spcAft>
-            </a:pPr>
-            <a:r>
-              <a:rPr sz="1500">
-                <a:solidFill>
-                  <a:srgbClr val="22282E"/>
-                </a:solidFill>
-              </a:rPr>
-              <a:t>•  Estándar no verificable ("contraseñas seguras") — Vago; cuantifica (longitud, algoritmo, MFA)</a:t>
+              <a:t>•  Vas a redactar un conjunto documental coherente sobre contraseñas y autenticación para "Ferretería del Sur S.A.".</a:t>
+            </a:r>
+          </a:p>
+          <a:p>
+            <a:pPr>
+              <a:spcAft>
+                <a:spcPts val="600"/>
+              </a:spcAft>
+            </a:pPr>
+            <a:r>
+              <a:rPr sz="1500">
+                <a:solidFill>
+                  <a:srgbClr val="22282E"/>
+                </a:solidFill>
+              </a:rPr>
+              <a:t>•  Política (1 nivel): redacta una Política de Control de Acceso de alto nivel (máx. 1 página) con: propósito, alcance, declaración de la dirección, roles, cumplimiento y sanciones. Añade metadatos…</a:t>
+            </a:r>
+          </a:p>
+          <a:p>
+            <a:pPr>
+              <a:spcAft>
+                <a:spcPts val="600"/>
+              </a:spcAft>
+            </a:pPr>
+            <a:r>
+              <a:rPr sz="1500">
+                <a:solidFill>
+                  <a:srgbClr val="22282E"/>
+                </a:solidFill>
+              </a:rPr>
+              <a:t>•  Estándar (2 nivel): deriva un Estándar de Autenticación concreto: longitud mínima de contraseña, uso obligatorio de MFA, algoritmo de hash (bcrypt/Argon2), bloqueo tras N intentos. Cada requisito…</a:t>
+            </a:r>
+          </a:p>
+          <a:p>
+            <a:pPr>
+              <a:spcAft>
+                <a:spcPts val="600"/>
+              </a:spcAft>
+            </a:pPr>
+            <a:r>
+              <a:rPr sz="1500">
+                <a:solidFill>
+                  <a:srgbClr val="22282E"/>
+                </a:solidFill>
+              </a:rPr>
+              <a:t>•  Baseline (3 nivel): define la configuración mínima de autenticación para servidores Linux (p. ej. políticas PAM, pwquality, expiración) y para la aplicación web.</a:t>
+            </a:r>
+          </a:p>
+          <a:p>
+            <a:pPr>
+              <a:spcAft>
+                <a:spcPts val="600"/>
+              </a:spcAft>
+            </a:pPr>
+            <a:r>
+              <a:rPr sz="1500">
+                <a:solidFill>
+                  <a:srgbClr val="22282E"/>
+                </a:solidFill>
+              </a:rPr>
+              <a:t>•  Procedimiento (4 nivel): escribe el procedimiento paso a paso "Alta y baja de una cuenta de usuario", numerado, con quién ejecuta, qué evidencia se guarda y verificación final.</a:t>
+            </a:r>
+          </a:p>
+          <a:p>
+            <a:pPr>
+              <a:spcAft>
+                <a:spcPts val="600"/>
+              </a:spcAft>
+            </a:pPr>
+            <a:r>
+              <a:rPr sz="1500">
+                <a:solidFill>
+                  <a:srgbClr val="22282E"/>
+                </a:solidFill>
+              </a:rPr>
+              <a:t>•  Directriz: añade 3 recomendaciones no obligatorias (p. ej. usar gestor de contraseñas).</a:t>
+            </a:r>
+          </a:p>
+          <a:p>
+            <a:pPr>
+              <a:spcAft>
+                <a:spcPts val="600"/>
+              </a:spcAft>
+            </a:pPr>
+            <a:r>
+              <a:rPr sz="1500">
+                <a:solidFill>
+                  <a:srgbClr val="22282E"/>
+                </a:solidFill>
+              </a:rPr>
+              <a:t>•  Trazabilidad: crea una tabla que vincule cada documento con el riesgo (acceso no autorizado) y la regulación (PCI Req.8, GDPR Art.32).</a:t>
             </a:r>
           </a:p>
         </p:txBody>
@@ -3347,7 +3381,7 @@
                   <a:srgbClr val="0B3D2E"/>
                 </a:solidFill>
               </a:rPr>
-              <a:t>❓ Preguntas frecuentes</a:t>
+              <a:t>✍️ Ejercicios</a:t>
             </a:r>
           </a:p>
         </p:txBody>
@@ -3385,97 +3419,82 @@
                   <a:srgbClr val="22282E"/>
                 </a:solidFill>
               </a:rPr>
-              <a:t>•  ❓ ¿Cuál es la diferencia práctica entre estándar y directriz?</a:t>
-            </a:r>
-          </a:p>
-          <a:p>
-            <a:pPr>
-              <a:spcAft>
-                <a:spcPts val="600"/>
-              </a:spcAft>
-            </a:pPr>
-            <a:r>
-              <a:rPr sz="1500">
-                <a:solidFill>
-                  <a:srgbClr val="22282E"/>
-                </a:solidFill>
-              </a:rPr>
-              <a:t>•  El estándar es obligatorio ("debe"); la directriz es recomendación ("debería"). Auditas el estándar, no la directriz.</a:t>
-            </a:r>
-          </a:p>
-          <a:p>
-            <a:pPr>
-              <a:spcAft>
-                <a:spcPts val="600"/>
-              </a:spcAft>
-            </a:pPr>
-            <a:r>
-              <a:rPr sz="1500">
-                <a:solidFill>
-                  <a:srgbClr val="22282E"/>
-                </a:solidFill>
-              </a:rPr>
-              <a:t>•  ❓ ¿Cada cuánto se revisan las políticas?</a:t>
-            </a:r>
-          </a:p>
-          <a:p>
-            <a:pPr>
-              <a:spcAft>
-                <a:spcPts val="600"/>
-              </a:spcAft>
-            </a:pPr>
-            <a:r>
-              <a:rPr sz="1500">
-                <a:solidFill>
-                  <a:srgbClr val="22282E"/>
-                </a:solidFill>
-              </a:rPr>
-              <a:t>•  Al menos anualmente y ante cambios relevantes (nueva regulación, incidente, reorganización). La fecha de próxima revisión va en los metadatos.</a:t>
-            </a:r>
-          </a:p>
-          <a:p>
-            <a:pPr>
-              <a:spcAft>
-                <a:spcPts val="600"/>
-              </a:spcAft>
-            </a:pPr>
-            <a:r>
-              <a:rPr sz="1500">
-                <a:solidFill>
-                  <a:srgbClr val="22282E"/>
-                </a:solidFill>
-              </a:rPr>
-              <a:t>•  ❓ ¿Quién aprueba una política?</a:t>
-            </a:r>
-          </a:p>
-          <a:p>
-            <a:pPr>
-              <a:spcAft>
-                <a:spcPts val="600"/>
-              </a:spcAft>
-            </a:pPr>
-            <a:r>
-              <a:rPr sz="1500">
-                <a:solidFill>
-                  <a:srgbClr val="22282E"/>
-                </a:solidFill>
-              </a:rPr>
-              <a:t>•  La dirección o el comité de seguridad; una política sin patrocinio de alto nivel carece de autoridad.</a:t>
-            </a:r>
-          </a:p>
-          <a:p>
-            <a:pPr>
-              <a:spcAft>
-                <a:spcPts val="600"/>
-              </a:spcAft>
-            </a:pPr>
-            <a:r>
-              <a:rPr sz="1500">
-                <a:solidFill>
-                  <a:srgbClr val="22282E"/>
-                </a:solidFill>
-              </a:rPr>
-              <a:t>•  ❓ ¿Puedo tener excepciones a una política?</a:t>
+              <a:t>•  Clasifica estas frases en política, estándar, baseline o procedimiento: "Usaremos MFA en todos los accesos"; "MFA mediante TOTP RFC 6238"; "Paso 3: escanear el QR con la app".</a:t>
+            </a:r>
+          </a:p>
+          <a:p>
+            <a:pPr>
+              <a:spcAft>
+                <a:spcPts val="600"/>
+              </a:spcAft>
+            </a:pPr>
+            <a:r>
+              <a:rPr sz="1500">
+                <a:solidFill>
+                  <a:srgbClr val="22282E"/>
+                </a:solidFill>
+              </a:rPr>
+              <a:t>•  Reescribe una política mal redactada que mezcla "qué" y "cómo" separando niveles.</a:t>
+            </a:r>
+          </a:p>
+          <a:p>
+            <a:pPr>
+              <a:spcAft>
+                <a:spcPts val="600"/>
+              </a:spcAft>
+            </a:pPr>
+            <a:r>
+              <a:rPr sz="1500">
+                <a:solidFill>
+                  <a:srgbClr val="22282E"/>
+                </a:solidFill>
+              </a:rPr>
+              <a:t>•  Diseña los metadatos mínimos que todo documento debe llevar.</a:t>
+            </a:r>
+          </a:p>
+          <a:p>
+            <a:pPr>
+              <a:spcAft>
+                <a:spcPts val="600"/>
+              </a:spcAft>
+            </a:pPr>
+            <a:r>
+              <a:rPr sz="1500">
+                <a:solidFill>
+                  <a:srgbClr val="22282E"/>
+                </a:solidFill>
+              </a:rPr>
+              <a:t>•  Redacta un procedimiento de "restauración de un backup" en 6 pasos verificables.</a:t>
+            </a:r>
+          </a:p>
+          <a:p>
+            <a:pPr>
+              <a:spcAft>
+                <a:spcPts val="600"/>
+              </a:spcAft>
+            </a:pPr>
+            <a:r>
+              <a:rPr sz="1500">
+                <a:solidFill>
+                  <a:srgbClr val="22282E"/>
+                </a:solidFill>
+              </a:rPr>
+              <a:t>•  Justifica por qué las directrices no deben ser obligatorias.</a:t>
+            </a:r>
+          </a:p>
+          <a:p>
+            <a:pPr>
+              <a:spcAft>
+                <a:spcPts val="600"/>
+              </a:spcAft>
+            </a:pPr>
+            <a:r>
+              <a:rPr sz="1500">
+                <a:solidFill>
+                  <a:srgbClr val="22282E"/>
+                </a:solidFill>
+              </a:rPr>
+              <a:t>•  Diseña el flujo de aprobación y revisión anual de una política.</a:t>
             </a:r>
           </a:p>
         </p:txBody>
@@ -3526,7 +3545,7 @@
                   <a:srgbClr val="0B3D2E"/>
                 </a:solidFill>
               </a:rPr>
-              <a:t>🔗 Referencias</a:t>
+              <a:t>📝 Reto verificable</a:t>
             </a:r>
           </a:p>
         </p:txBody>
@@ -3564,6 +3583,438 @@
                   <a:srgbClr val="22282E"/>
                 </a:solidFill>
               </a:rPr>
+              <a:t>•  Entrega un paquete documental de control de acceso con los cuatro niveles (política, estándar, baseline y procedimiento) coherentes entre sí, cada uno con metadatos completos, más una tabla de…</a:t>
+            </a:r>
+          </a:p>
+          <a:p>
+            <a:pPr>
+              <a:spcAft>
+                <a:spcPts val="600"/>
+              </a:spcAft>
+            </a:pPr>
+            <a:r>
+              <a:rPr sz="1500">
+                <a:solidFill>
+                  <a:srgbClr val="22282E"/>
+                </a:solidFill>
+              </a:rPr>
+              <a:t>•  Criterio de aceptación: la política no contiene detalles técnicos de "cómo" (esos van en estándar/procedimiento), cada estándar es verificable, el procedimiento es reproducible por un tercero, y todo…</a:t>
+            </a:r>
+          </a:p>
+        </p:txBody>
+      </p:sp>
+    </p:spTree>
+  </p:cSld>
+  <p:clrMapOvr>
+    <a:masterClrMapping/>
+  </p:clrMapOvr>
+</p:sld>
+</file>
+
+<file path=ppt/slides/slide13.xml><?xml version="1.0" encoding="utf-8"?>
+<p:sld xmlns:a="http://schemas.openxmlformats.org/drawingml/2006/main" xmlns:p="http://schemas.openxmlformats.org/presentationml/2006/main" xmlns:r="http://schemas.openxmlformats.org/officeDocument/2006/relationships">
+  <p:cSld>
+    <p:spTree>
+      <p:nvGrpSpPr>
+        <p:cNvPr id="1" name=""/>
+        <p:cNvGrpSpPr/>
+        <p:nvPr/>
+      </p:nvGrpSpPr>
+      <p:grpSpPr/>
+      <p:sp>
+        <p:nvSpPr>
+          <p:cNvPr id="2" name="TextBox 1"/>
+          <p:cNvSpPr txBox="1"/>
+          <p:nvPr/>
+        </p:nvSpPr>
+        <p:spPr>
+          <a:xfrm>
+            <a:off x="457200" y="320040"/>
+            <a:ext cx="8229600" cy="822960"/>
+          </a:xfrm>
+          <a:prstGeom prst="rect">
+            <a:avLst/>
+          </a:prstGeom>
+          <a:noFill/>
+        </p:spPr>
+        <p:txBody>
+          <a:bodyPr wrap="square">
+            <a:spAutoFit/>
+          </a:bodyPr>
+          <a:lstStyle/>
+          <a:p>
+            <a:r>
+              <a:rPr sz="2600" b="1">
+                <a:solidFill>
+                  <a:srgbClr val="0B3D2E"/>
+                </a:solidFill>
+              </a:rPr>
+              <a:t>⚠️ Errores comunes</a:t>
+            </a:r>
+          </a:p>
+        </p:txBody>
+      </p:sp>
+      <p:sp>
+        <p:nvSpPr>
+          <p:cNvPr id="3" name="TextBox 2"/>
+          <p:cNvSpPr txBox="1"/>
+          <p:nvPr/>
+        </p:nvSpPr>
+        <p:spPr>
+          <a:xfrm>
+            <a:off x="457200" y="1280160"/>
+            <a:ext cx="8229600" cy="4937760"/>
+          </a:xfrm>
+          <a:prstGeom prst="rect">
+            <a:avLst/>
+          </a:prstGeom>
+          <a:noFill/>
+        </p:spPr>
+        <p:txBody>
+          <a:bodyPr wrap="square">
+            <a:spAutoFit/>
+          </a:bodyPr>
+          <a:lstStyle/>
+          <a:p>
+            <a:pPr>
+              <a:spcAft>
+                <a:spcPts val="600"/>
+              </a:spcAft>
+            </a:pPr>
+            <a:r>
+              <a:rPr sz="1500">
+                <a:solidFill>
+                  <a:srgbClr val="22282E"/>
+                </a:solidFill>
+              </a:rPr>
+              <a:t>•  Política de 20 páginas con detalles técnicos — Mezcla niveles; sube el "cómo" a estándar/procedimiento</a:t>
+            </a:r>
+          </a:p>
+          <a:p>
+            <a:pPr>
+              <a:spcAft>
+                <a:spcPts val="600"/>
+              </a:spcAft>
+            </a:pPr>
+            <a:r>
+              <a:rPr sz="1500">
+                <a:solidFill>
+                  <a:srgbClr val="22282E"/>
+                </a:solidFill>
+              </a:rPr>
+              <a:t>•  Documentos sin propietario ni fecha de revisión — Quedan obsoletos; añade metadatos y ciclo de revisión</a:t>
+            </a:r>
+          </a:p>
+          <a:p>
+            <a:pPr>
+              <a:spcAft>
+                <a:spcPts val="600"/>
+              </a:spcAft>
+            </a:pPr>
+            <a:r>
+              <a:rPr sz="1500">
+                <a:solidFill>
+                  <a:srgbClr val="22282E"/>
+                </a:solidFill>
+              </a:rPr>
+              <a:t>•  Nadie sigue el procedimiento — No es reproducible o no se comunicó; simplifica y forma</a:t>
+            </a:r>
+          </a:p>
+          <a:p>
+            <a:pPr>
+              <a:spcAft>
+                <a:spcPts val="600"/>
+              </a:spcAft>
+            </a:pPr>
+            <a:r>
+              <a:rPr sz="1500">
+                <a:solidFill>
+                  <a:srgbClr val="22282E"/>
+                </a:solidFill>
+              </a:rPr>
+              <a:t>•  Excepciones permanentes — Contradicen la política; ponles caducidad y revisión</a:t>
+            </a:r>
+          </a:p>
+          <a:p>
+            <a:pPr>
+              <a:spcAft>
+                <a:spcPts val="600"/>
+              </a:spcAft>
+            </a:pPr>
+            <a:r>
+              <a:rPr sz="1500">
+                <a:solidFill>
+                  <a:srgbClr val="22282E"/>
+                </a:solidFill>
+              </a:rPr>
+              <a:t>•  Estándar no verificable ("contraseñas seguras") — Vago; cuantifica (longitud, algoritmo, MFA)</a:t>
+            </a:r>
+          </a:p>
+        </p:txBody>
+      </p:sp>
+    </p:spTree>
+  </p:cSld>
+  <p:clrMapOvr>
+    <a:masterClrMapping/>
+  </p:clrMapOvr>
+</p:sld>
+</file>
+
+<file path=ppt/slides/slide14.xml><?xml version="1.0" encoding="utf-8"?>
+<p:sld xmlns:a="http://schemas.openxmlformats.org/drawingml/2006/main" xmlns:p="http://schemas.openxmlformats.org/presentationml/2006/main" xmlns:r="http://schemas.openxmlformats.org/officeDocument/2006/relationships">
+  <p:cSld>
+    <p:spTree>
+      <p:nvGrpSpPr>
+        <p:cNvPr id="1" name=""/>
+        <p:cNvGrpSpPr/>
+        <p:nvPr/>
+      </p:nvGrpSpPr>
+      <p:grpSpPr/>
+      <p:sp>
+        <p:nvSpPr>
+          <p:cNvPr id="2" name="TextBox 1"/>
+          <p:cNvSpPr txBox="1"/>
+          <p:nvPr/>
+        </p:nvSpPr>
+        <p:spPr>
+          <a:xfrm>
+            <a:off x="457200" y="320040"/>
+            <a:ext cx="8229600" cy="822960"/>
+          </a:xfrm>
+          <a:prstGeom prst="rect">
+            <a:avLst/>
+          </a:prstGeom>
+          <a:noFill/>
+        </p:spPr>
+        <p:txBody>
+          <a:bodyPr wrap="square">
+            <a:spAutoFit/>
+          </a:bodyPr>
+          <a:lstStyle/>
+          <a:p>
+            <a:r>
+              <a:rPr sz="2600" b="1">
+                <a:solidFill>
+                  <a:srgbClr val="0B3D2E"/>
+                </a:solidFill>
+              </a:rPr>
+              <a:t>❓ Preguntas frecuentes</a:t>
+            </a:r>
+          </a:p>
+        </p:txBody>
+      </p:sp>
+      <p:sp>
+        <p:nvSpPr>
+          <p:cNvPr id="3" name="TextBox 2"/>
+          <p:cNvSpPr txBox="1"/>
+          <p:nvPr/>
+        </p:nvSpPr>
+        <p:spPr>
+          <a:xfrm>
+            <a:off x="457200" y="1280160"/>
+            <a:ext cx="8229600" cy="4937760"/>
+          </a:xfrm>
+          <a:prstGeom prst="rect">
+            <a:avLst/>
+          </a:prstGeom>
+          <a:noFill/>
+        </p:spPr>
+        <p:txBody>
+          <a:bodyPr wrap="square">
+            <a:spAutoFit/>
+          </a:bodyPr>
+          <a:lstStyle/>
+          <a:p>
+            <a:pPr>
+              <a:spcAft>
+                <a:spcPts val="600"/>
+              </a:spcAft>
+            </a:pPr>
+            <a:r>
+              <a:rPr sz="1500">
+                <a:solidFill>
+                  <a:srgbClr val="22282E"/>
+                </a:solidFill>
+              </a:rPr>
+              <a:t>•  ❓ ¿Cuál es la diferencia práctica entre estándar y directriz?</a:t>
+            </a:r>
+          </a:p>
+          <a:p>
+            <a:pPr>
+              <a:spcAft>
+                <a:spcPts val="600"/>
+              </a:spcAft>
+            </a:pPr>
+            <a:r>
+              <a:rPr sz="1500">
+                <a:solidFill>
+                  <a:srgbClr val="22282E"/>
+                </a:solidFill>
+              </a:rPr>
+              <a:t>•  El estándar es obligatorio ("debe"); la directriz es recomendación ("debería"). Auditas el estándar, no la directriz.</a:t>
+            </a:r>
+          </a:p>
+          <a:p>
+            <a:pPr>
+              <a:spcAft>
+                <a:spcPts val="600"/>
+              </a:spcAft>
+            </a:pPr>
+            <a:r>
+              <a:rPr sz="1500">
+                <a:solidFill>
+                  <a:srgbClr val="22282E"/>
+                </a:solidFill>
+              </a:rPr>
+              <a:t>•  ❓ ¿Cada cuánto se revisan las políticas?</a:t>
+            </a:r>
+          </a:p>
+          <a:p>
+            <a:pPr>
+              <a:spcAft>
+                <a:spcPts val="600"/>
+              </a:spcAft>
+            </a:pPr>
+            <a:r>
+              <a:rPr sz="1500">
+                <a:solidFill>
+                  <a:srgbClr val="22282E"/>
+                </a:solidFill>
+              </a:rPr>
+              <a:t>•  Al menos anualmente y ante cambios relevantes (nueva regulación, incidente, reorganización). La fecha de próxima revisión va en los metadatos.</a:t>
+            </a:r>
+          </a:p>
+          <a:p>
+            <a:pPr>
+              <a:spcAft>
+                <a:spcPts val="600"/>
+              </a:spcAft>
+            </a:pPr>
+            <a:r>
+              <a:rPr sz="1500">
+                <a:solidFill>
+                  <a:srgbClr val="22282E"/>
+                </a:solidFill>
+              </a:rPr>
+              <a:t>•  ❓ ¿Quién aprueba una política?</a:t>
+            </a:r>
+          </a:p>
+          <a:p>
+            <a:pPr>
+              <a:spcAft>
+                <a:spcPts val="600"/>
+              </a:spcAft>
+            </a:pPr>
+            <a:r>
+              <a:rPr sz="1500">
+                <a:solidFill>
+                  <a:srgbClr val="22282E"/>
+                </a:solidFill>
+              </a:rPr>
+              <a:t>•  La dirección o el comité de seguridad; una política sin patrocinio de alto nivel carece de autoridad.</a:t>
+            </a:r>
+          </a:p>
+          <a:p>
+            <a:pPr>
+              <a:spcAft>
+                <a:spcPts val="600"/>
+              </a:spcAft>
+            </a:pPr>
+            <a:r>
+              <a:rPr sz="1500">
+                <a:solidFill>
+                  <a:srgbClr val="22282E"/>
+                </a:solidFill>
+              </a:rPr>
+              <a:t>•  ❓ ¿Puedo tener excepciones a una política?</a:t>
+            </a:r>
+          </a:p>
+        </p:txBody>
+      </p:sp>
+    </p:spTree>
+  </p:cSld>
+  <p:clrMapOvr>
+    <a:masterClrMapping/>
+  </p:clrMapOvr>
+</p:sld>
+</file>
+
+<file path=ppt/slides/slide15.xml><?xml version="1.0" encoding="utf-8"?>
+<p:sld xmlns:a="http://schemas.openxmlformats.org/drawingml/2006/main" xmlns:p="http://schemas.openxmlformats.org/presentationml/2006/main" xmlns:r="http://schemas.openxmlformats.org/officeDocument/2006/relationships">
+  <p:cSld>
+    <p:spTree>
+      <p:nvGrpSpPr>
+        <p:cNvPr id="1" name=""/>
+        <p:cNvGrpSpPr/>
+        <p:nvPr/>
+      </p:nvGrpSpPr>
+      <p:grpSpPr/>
+      <p:sp>
+        <p:nvSpPr>
+          <p:cNvPr id="2" name="TextBox 1"/>
+          <p:cNvSpPr txBox="1"/>
+          <p:nvPr/>
+        </p:nvSpPr>
+        <p:spPr>
+          <a:xfrm>
+            <a:off x="457200" y="320040"/>
+            <a:ext cx="8229600" cy="822960"/>
+          </a:xfrm>
+          <a:prstGeom prst="rect">
+            <a:avLst/>
+          </a:prstGeom>
+          <a:noFill/>
+        </p:spPr>
+        <p:txBody>
+          <a:bodyPr wrap="square">
+            <a:spAutoFit/>
+          </a:bodyPr>
+          <a:lstStyle/>
+          <a:p>
+            <a:r>
+              <a:rPr sz="2600" b="1">
+                <a:solidFill>
+                  <a:srgbClr val="0B3D2E"/>
+                </a:solidFill>
+              </a:rPr>
+              <a:t>🔗 Referencias</a:t>
+            </a:r>
+          </a:p>
+        </p:txBody>
+      </p:sp>
+      <p:sp>
+        <p:nvSpPr>
+          <p:cNvPr id="3" name="TextBox 2"/>
+          <p:cNvSpPr txBox="1"/>
+          <p:nvPr/>
+        </p:nvSpPr>
+        <p:spPr>
+          <a:xfrm>
+            <a:off x="457200" y="1280160"/>
+            <a:ext cx="8229600" cy="4937760"/>
+          </a:xfrm>
+          <a:prstGeom prst="rect">
+            <a:avLst/>
+          </a:prstGeom>
+          <a:noFill/>
+        </p:spPr>
+        <p:txBody>
+          <a:bodyPr wrap="square">
+            <a:spAutoFit/>
+          </a:bodyPr>
+          <a:lstStyle/>
+          <a:p>
+            <a:pPr>
+              <a:spcAft>
+                <a:spcPts val="600"/>
+              </a:spcAft>
+            </a:pPr>
+            <a:r>
+              <a:rPr sz="1500">
+                <a:solidFill>
+                  <a:srgbClr val="22282E"/>
+                </a:solidFill>
+              </a:rPr>
               <a:t>•  (ISC)² CISSP Official Study Guide, dominio 1 (Documentación de seguridad).</a:t>
             </a:r>
           </a:p>
@@ -3629,6 +4080,81 @@
           </a:p>
         </p:txBody>
       </p:sp>
+    </p:spTree>
+  </p:cSld>
+  <p:clrMapOvr>
+    <a:masterClrMapping/>
+  </p:clrMapOvr>
+</p:sld>
+</file>
+
+<file path=ppt/slides/slide16.xml><?xml version="1.0" encoding="utf-8"?>
+<p:sld xmlns:a="http://schemas.openxmlformats.org/drawingml/2006/main" xmlns:p="http://schemas.openxmlformats.org/presentationml/2006/main" xmlns:r="http://schemas.openxmlformats.org/officeDocument/2006/relationships">
+  <p:cSld>
+    <p:spTree>
+      <p:nvGrpSpPr>
+        <p:cNvPr id="1" name=""/>
+        <p:cNvGrpSpPr/>
+        <p:nvPr/>
+      </p:nvGrpSpPr>
+      <p:grpSpPr/>
+      <p:sp>
+        <p:nvSpPr>
+          <p:cNvPr id="2" name="TextBox 1"/>
+          <p:cNvSpPr txBox="1"/>
+          <p:nvPr/>
+        </p:nvSpPr>
+        <p:spPr>
+          <a:xfrm>
+            <a:off x="457200" y="274320"/>
+            <a:ext cx="8229600" cy="640080"/>
+          </a:xfrm>
+          <a:prstGeom prst="rect">
+            <a:avLst/>
+          </a:prstGeom>
+          <a:noFill/>
+        </p:spPr>
+        <p:txBody>
+          <a:bodyPr wrap="square">
+            <a:spAutoFit/>
+          </a:bodyPr>
+          <a:lstStyle/>
+          <a:p>
+            <a:r>
+              <a:rPr sz="2200" b="1">
+                <a:solidFill>
+                  <a:srgbClr val="0B3D2E"/>
+                </a:solidFill>
+              </a:rPr>
+              <a:t>Diagrama de la clase</a:t>
+            </a:r>
+          </a:p>
+        </p:txBody>
+      </p:sp>
+      <p:pic>
+        <p:nvPicPr>
+          <p:cNvPr id="3" name="Picture 2" descr="a3b1373ab97e2194.png"/>
+          <p:cNvPicPr>
+            <a:picLocks noChangeAspect="1"/>
+          </p:cNvPicPr>
+          <p:nvPr/>
+        </p:nvPicPr>
+        <p:blipFill>
+          <a:blip r:embed="rId2"/>
+          <a:stretch>
+            <a:fillRect/>
+          </a:stretch>
+        </p:blipFill>
+        <p:spPr>
+          <a:xfrm>
+            <a:off x="2912915" y="1097280"/>
+            <a:ext cx="3318170" cy="5303520"/>
+          </a:xfrm>
+          <a:prstGeom prst="rect">
+            <a:avLst/>
+          </a:prstGeom>
+        </p:spPr>
+      </p:pic>
     </p:spTree>
   </p:cSld>
   <p:clrMapOvr>
@@ -3713,7 +4239,7 @@
                   <a:srgbClr val="22282E"/>
                 </a:solidFill>
               </a:rPr>
-              <a:t>•  Aprender a construir la jerarquía documental que sostiene un programa de seguridad: políticas, estándares, líneas base (baselines), directrices (guidelines) y procedimientos. Al terminar sabrás redactar una política clara y auditable, diferenciar cada tipo de documento, gestionar su ciclo de vida (aprobación, versión, revisión) y evitar el documento "de estantería" que nadie aplica.</a:t>
+              <a:t>•  Aprender a construir la jerarquía documental que sostiene un programa de seguridad: políticas, estándares, líneas base (baselines), directrices (guidelines) y procedimientos. Al terminar sabrás…</a:t>
             </a:r>
           </a:p>
         </p:txBody>
@@ -4107,7 +4633,7 @@
                   <a:srgbClr val="0B3D2E"/>
                 </a:solidFill>
               </a:rPr>
-              <a:t>📖 Definiciones y características</a:t>
+              <a:t>🧠 Explicación en profundidad</a:t>
             </a:r>
           </a:p>
         </p:txBody>
@@ -4145,82 +4671,22 @@
                   <a:srgbClr val="22282E"/>
                 </a:solidFill>
               </a:rPr>
-              <a:t>•  Política: declaración de alto nivel, obligatoria, aprobada por la dirección, que fija la intención y las reglas generales. Clave: dice el "qué" y el "por qué", no el "cómo".</a:t>
-            </a:r>
-          </a:p>
-          <a:p>
-            <a:pPr>
-              <a:spcAft>
-                <a:spcPts val="600"/>
-              </a:spcAft>
-            </a:pPr>
-            <a:r>
-              <a:rPr sz="1500">
-                <a:solidFill>
-                  <a:srgbClr val="22282E"/>
-                </a:solidFill>
-              </a:rPr>
-              <a:t>•  Estándar: requisito obligatorio y específico que da soporte a una política (p. ej. "AES-256 para datos en reposo"). Clave: medible y verificable.</a:t>
-            </a:r>
-          </a:p>
-          <a:p>
-            <a:pPr>
-              <a:spcAft>
-                <a:spcPts val="600"/>
-              </a:spcAft>
-            </a:pPr>
-            <a:r>
-              <a:rPr sz="1500">
-                <a:solidFill>
-                  <a:srgbClr val="22282E"/>
-                </a:solidFill>
-              </a:rPr>
-              <a:t>•  Baseline (línea base): nivel mínimo de seguridad para una categoría de sistema. Clave: configuración de partida obligatoria.</a:t>
-            </a:r>
-          </a:p>
-          <a:p>
-            <a:pPr>
-              <a:spcAft>
-                <a:spcPts val="600"/>
-              </a:spcAft>
-            </a:pPr>
-            <a:r>
-              <a:rPr sz="1500">
-                <a:solidFill>
-                  <a:srgbClr val="22282E"/>
-                </a:solidFill>
-              </a:rPr>
-              <a:t>•  Directriz (guideline): recomendación no obligatoria, buenas prácticas. Clave: "debería", no "debe".</a:t>
-            </a:r>
-          </a:p>
-          <a:p>
-            <a:pPr>
-              <a:spcAft>
-                <a:spcPts val="600"/>
-              </a:spcAft>
-            </a:pPr>
-            <a:r>
-              <a:rPr sz="1500">
-                <a:solidFill>
-                  <a:srgbClr val="22282E"/>
-                </a:solidFill>
-              </a:rPr>
-              <a:t>•  Procedimiento: instrucciones paso a paso para ejecutar una tarea. Clave: reproducible por cualquiera con el rol adecuado.</a:t>
-            </a:r>
-          </a:p>
-          <a:p>
-            <a:pPr>
-              <a:spcAft>
-                <a:spcPts val="600"/>
-              </a:spcAft>
-            </a:pPr>
-            <a:r>
-              <a:rPr sz="1500">
-                <a:solidFill>
-                  <a:srgbClr val="22282E"/>
-                </a:solidFill>
-              </a:rPr>
-              <a:t>•  Excepción: desviación aprobada y temporal de una política/estándar. Clave: se documenta, se aprueba y caduca.</a:t>
+              <a:t>•  La política expresa intención y autoridad; el estándar fija requisitos obligatorios; el procedimiento describe ejecución; la guía orienta. Mezclarlos produce documentos imposibles de mantener. Cada…</a:t>
+            </a:r>
+          </a:p>
+          <a:p>
+            <a:pPr>
+              <a:spcAft>
+                <a:spcPts val="600"/>
+              </a:spcAft>
+            </a:pPr>
+            <a:r>
+              <a:rPr sz="1500">
+                <a:solidFill>
+                  <a:srgbClr val="22282E"/>
+                </a:solidFill>
+              </a:rPr>
+              <a:t>•  Una política exige «parchear inmediatamente». Operaciones no puede medirla. Se crea estándar por riesgo y procedimiento de excepción; los registros permiten comprobar cumplimiento.</a:t>
             </a:r>
           </a:p>
         </p:txBody>
@@ -4271,7 +4737,7 @@
                   <a:srgbClr val="0B3D2E"/>
                 </a:solidFill>
               </a:rPr>
-              <a:t>🧰 Herramientas y preparación</a:t>
+              <a:t>📔 Glosario operativo</a:t>
             </a:r>
           </a:p>
         </p:txBody>
@@ -4309,52 +4775,52 @@
                   <a:srgbClr val="22282E"/>
                 </a:solidFill>
               </a:rPr>
-              <a:t>•  Editor Markdown o procesador de texto con control de cambios.</a:t>
-            </a:r>
-          </a:p>
-          <a:p>
-            <a:pPr>
-              <a:spcAft>
-                <a:spcPts val="600"/>
-              </a:spcAft>
-            </a:pPr>
-            <a:r>
-              <a:rPr sz="1500">
-                <a:solidFill>
-                  <a:srgbClr val="22282E"/>
-                </a:solidFill>
-              </a:rPr>
-              <a:t>•  Un sistema de versionado (Git, o el control de versiones de la wiki corporativa).</a:t>
-            </a:r>
-          </a:p>
-          <a:p>
-            <a:pPr>
-              <a:spcAft>
-                <a:spcPts val="600"/>
-              </a:spcAft>
-            </a:pPr>
-            <a:r>
-              <a:rPr sz="1500">
-                <a:solidFill>
-                  <a:srgbClr val="22282E"/>
-                </a:solidFill>
-              </a:rPr>
-              <a:t>•  Referencias de estructura: SANS Security Policy Templates y NIST SP 800-12/800-100 como inspiración de forma (no copies contenido).</a:t>
-            </a:r>
-          </a:p>
-          <a:p>
-            <a:pPr>
-              <a:spcAft>
-                <a:spcPts val="600"/>
-              </a:spcAft>
-            </a:pPr>
-            <a:r>
-              <a:rPr sz="1500">
-                <a:solidFill>
-                  <a:srgbClr val="22282E"/>
-                </a:solidFill>
-              </a:rPr>
-              <a:t>•  Una plantilla de metadatos: título, versión, propietario, fecha de aprobación, próxima revisión, clasificación.</a:t>
+              <a:t>•  Término — Definición</a:t>
+            </a:r>
+          </a:p>
+          <a:p>
+            <a:pPr>
+              <a:spcAft>
+                <a:spcPts val="600"/>
+              </a:spcAft>
+            </a:pPr>
+            <a:r>
+              <a:rPr sz="1500">
+                <a:solidFill>
+                  <a:srgbClr val="22282E"/>
+                </a:solidFill>
+              </a:rPr>
+              <a:t>•  Política — Mandato de alto nivel aprobado por autoridad.</a:t>
+            </a:r>
+          </a:p>
+          <a:p>
+            <a:pPr>
+              <a:spcAft>
+                <a:spcPts val="600"/>
+              </a:spcAft>
+            </a:pPr>
+            <a:r>
+              <a:rPr sz="1500">
+                <a:solidFill>
+                  <a:srgbClr val="22282E"/>
+                </a:solidFill>
+              </a:rPr>
+              <a:t>•  Estándar — Requisito obligatorio y verificable.</a:t>
+            </a:r>
+          </a:p>
+          <a:p>
+            <a:pPr>
+              <a:spcAft>
+                <a:spcPts val="600"/>
+              </a:spcAft>
+            </a:pPr>
+            <a:r>
+              <a:rPr sz="1500">
+                <a:solidFill>
+                  <a:srgbClr val="22282E"/>
+                </a:solidFill>
+              </a:rPr>
+              <a:t>•  Procedimiento — Secuencia operativa mantenida por un dueño.</a:t>
             </a:r>
           </a:p>
         </p:txBody>
@@ -4405,7 +4871,7 @@
                   <a:srgbClr val="0B3D2E"/>
                 </a:solidFill>
               </a:rPr>
-              <a:t>🧪 Laboratorio guiado (ejercicio aplicado)</a:t>
+              <a:t>✅ Criterio de dominio</a:t>
             </a:r>
           </a:p>
         </p:txBody>
@@ -4443,97 +4909,7 @@
                   <a:srgbClr val="22282E"/>
                 </a:solidFill>
               </a:rPr>
-              <a:t>•  Vas a redactar un conjunto documental coherente sobre contraseñas y autenticación para "Ferretería del Sur S.A.".</a:t>
-            </a:r>
-          </a:p>
-          <a:p>
-            <a:pPr>
-              <a:spcAft>
-                <a:spcPts val="600"/>
-              </a:spcAft>
-            </a:pPr>
-            <a:r>
-              <a:rPr sz="1500">
-                <a:solidFill>
-                  <a:srgbClr val="22282E"/>
-                </a:solidFill>
-              </a:rPr>
-              <a:t>•  Política (1 nivel): redacta una Política de Control de Acceso de alto nivel (máx. 1 página) con: propósito, alcance, declaración de la dirección, roles, cumplimiento y sanciones. Añade metadatos (versión 1.0, propietario CISO, revisión anual).</a:t>
-            </a:r>
-          </a:p>
-          <a:p>
-            <a:pPr>
-              <a:spcAft>
-                <a:spcPts val="600"/>
-              </a:spcAft>
-            </a:pPr>
-            <a:r>
-              <a:rPr sz="1500">
-                <a:solidFill>
-                  <a:srgbClr val="22282E"/>
-                </a:solidFill>
-              </a:rPr>
-              <a:t>•  Estándar (2 nivel): deriva un Estándar de Autenticación concreto: longitud mínima de contraseña, uso obligatorio de MFA, algoritmo de hash (bcrypt/Argon2), bloqueo tras N intentos. Cada requisito debe ser verificable.</a:t>
-            </a:r>
-          </a:p>
-          <a:p>
-            <a:pPr>
-              <a:spcAft>
-                <a:spcPts val="600"/>
-              </a:spcAft>
-            </a:pPr>
-            <a:r>
-              <a:rPr sz="1500">
-                <a:solidFill>
-                  <a:srgbClr val="22282E"/>
-                </a:solidFill>
-              </a:rPr>
-              <a:t>•  Baseline (3 nivel): define la configuración mínima de autenticación para servidores Linux (p. ej. políticas PAM, pwquality, expiración) y para la aplicación web.</a:t>
-            </a:r>
-          </a:p>
-          <a:p>
-            <a:pPr>
-              <a:spcAft>
-                <a:spcPts val="600"/>
-              </a:spcAft>
-            </a:pPr>
-            <a:r>
-              <a:rPr sz="1500">
-                <a:solidFill>
-                  <a:srgbClr val="22282E"/>
-                </a:solidFill>
-              </a:rPr>
-              <a:t>•  Procedimiento (4 nivel): escribe el procedimiento paso a paso "Alta y baja de una cuenta de usuario", numerado, con quién ejecuta, qué evidencia se guarda y verificación final.</a:t>
-            </a:r>
-          </a:p>
-          <a:p>
-            <a:pPr>
-              <a:spcAft>
-                <a:spcPts val="600"/>
-              </a:spcAft>
-            </a:pPr>
-            <a:r>
-              <a:rPr sz="1500">
-                <a:solidFill>
-                  <a:srgbClr val="22282E"/>
-                </a:solidFill>
-              </a:rPr>
-              <a:t>•  Directriz: añade 3 recomendaciones no obligatorias (p. ej. usar gestor de contraseñas).</a:t>
-            </a:r>
-          </a:p>
-          <a:p>
-            <a:pPr>
-              <a:spcAft>
-                <a:spcPts val="600"/>
-              </a:spcAft>
-            </a:pPr>
-            <a:r>
-              <a:rPr sz="1500">
-                <a:solidFill>
-                  <a:srgbClr val="22282E"/>
-                </a:solidFill>
-              </a:rPr>
-              <a:t>•  Trazabilidad: crea una tabla que vincule cada documento con el riesgo (acceso no autorizado) y la regulación (PCI Req.8, GDPR Art.32).</a:t>
+              <a:t>•  Hay dominio cuando el alumno convierte intención en requisito verificable, ejecución, excepción y registro coherentes.</a:t>
             </a:r>
           </a:p>
         </p:txBody>
@@ -4584,7 +4960,7 @@
                   <a:srgbClr val="0B3D2E"/>
                 </a:solidFill>
               </a:rPr>
-              <a:t>✍️ Ejercicios</a:t>
+              <a:t>📖 Definiciones y características</a:t>
             </a:r>
           </a:p>
         </p:txBody>
@@ -4622,82 +4998,82 @@
                   <a:srgbClr val="22282E"/>
                 </a:solidFill>
               </a:rPr>
-              <a:t>•  Clasifica estas frases en política, estándar, baseline o procedimiento: "Usaremos MFA en todos los accesos"; "MFA mediante TOTP RFC 6238"; "Paso 3: escanear el QR con la app".</a:t>
-            </a:r>
-          </a:p>
-          <a:p>
-            <a:pPr>
-              <a:spcAft>
-                <a:spcPts val="600"/>
-              </a:spcAft>
-            </a:pPr>
-            <a:r>
-              <a:rPr sz="1500">
-                <a:solidFill>
-                  <a:srgbClr val="22282E"/>
-                </a:solidFill>
-              </a:rPr>
-              <a:t>•  Reescribe una política mal redactada que mezcla "qué" y "cómo" separando niveles.</a:t>
-            </a:r>
-          </a:p>
-          <a:p>
-            <a:pPr>
-              <a:spcAft>
-                <a:spcPts val="600"/>
-              </a:spcAft>
-            </a:pPr>
-            <a:r>
-              <a:rPr sz="1500">
-                <a:solidFill>
-                  <a:srgbClr val="22282E"/>
-                </a:solidFill>
-              </a:rPr>
-              <a:t>•  Diseña los metadatos mínimos que todo documento debe llevar.</a:t>
-            </a:r>
-          </a:p>
-          <a:p>
-            <a:pPr>
-              <a:spcAft>
-                <a:spcPts val="600"/>
-              </a:spcAft>
-            </a:pPr>
-            <a:r>
-              <a:rPr sz="1500">
-                <a:solidFill>
-                  <a:srgbClr val="22282E"/>
-                </a:solidFill>
-              </a:rPr>
-              <a:t>•  Redacta un procedimiento de "restauración de un backup" en 6 pasos verificables.</a:t>
-            </a:r>
-          </a:p>
-          <a:p>
-            <a:pPr>
-              <a:spcAft>
-                <a:spcPts val="600"/>
-              </a:spcAft>
-            </a:pPr>
-            <a:r>
-              <a:rPr sz="1500">
-                <a:solidFill>
-                  <a:srgbClr val="22282E"/>
-                </a:solidFill>
-              </a:rPr>
-              <a:t>•  Justifica por qué las directrices no deben ser obligatorias.</a:t>
-            </a:r>
-          </a:p>
-          <a:p>
-            <a:pPr>
-              <a:spcAft>
-                <a:spcPts val="600"/>
-              </a:spcAft>
-            </a:pPr>
-            <a:r>
-              <a:rPr sz="1500">
-                <a:solidFill>
-                  <a:srgbClr val="22282E"/>
-                </a:solidFill>
-              </a:rPr>
-              <a:t>•  Diseña el flujo de aprobación y revisión anual de una política.</a:t>
+              <a:t>•  Política: declaración de alto nivel, obligatoria, aprobada por la dirección, que fija la intención y las reglas generales. Clave: dice el "qué" y el "por qué", no el "cómo".</a:t>
+            </a:r>
+          </a:p>
+          <a:p>
+            <a:pPr>
+              <a:spcAft>
+                <a:spcPts val="600"/>
+              </a:spcAft>
+            </a:pPr>
+            <a:r>
+              <a:rPr sz="1500">
+                <a:solidFill>
+                  <a:srgbClr val="22282E"/>
+                </a:solidFill>
+              </a:rPr>
+              <a:t>•  Estándar: requisito obligatorio y específico que da soporte a una política (p. ej. "AES-256 para datos en reposo"). Clave: medible y verificable.</a:t>
+            </a:r>
+          </a:p>
+          <a:p>
+            <a:pPr>
+              <a:spcAft>
+                <a:spcPts val="600"/>
+              </a:spcAft>
+            </a:pPr>
+            <a:r>
+              <a:rPr sz="1500">
+                <a:solidFill>
+                  <a:srgbClr val="22282E"/>
+                </a:solidFill>
+              </a:rPr>
+              <a:t>•  Baseline (línea base): nivel mínimo de seguridad para una categoría de sistema. Clave: configuración de partida obligatoria.</a:t>
+            </a:r>
+          </a:p>
+          <a:p>
+            <a:pPr>
+              <a:spcAft>
+                <a:spcPts val="600"/>
+              </a:spcAft>
+            </a:pPr>
+            <a:r>
+              <a:rPr sz="1500">
+                <a:solidFill>
+                  <a:srgbClr val="22282E"/>
+                </a:solidFill>
+              </a:rPr>
+              <a:t>•  Directriz (guideline): recomendación no obligatoria, buenas prácticas. Clave: "debería", no "debe".</a:t>
+            </a:r>
+          </a:p>
+          <a:p>
+            <a:pPr>
+              <a:spcAft>
+                <a:spcPts val="600"/>
+              </a:spcAft>
+            </a:pPr>
+            <a:r>
+              <a:rPr sz="1500">
+                <a:solidFill>
+                  <a:srgbClr val="22282E"/>
+                </a:solidFill>
+              </a:rPr>
+              <a:t>•  Procedimiento: instrucciones paso a paso para ejecutar una tarea. Clave: reproducible por cualquiera con el rol adecuado.</a:t>
+            </a:r>
+          </a:p>
+          <a:p>
+            <a:pPr>
+              <a:spcAft>
+                <a:spcPts val="600"/>
+              </a:spcAft>
+            </a:pPr>
+            <a:r>
+              <a:rPr sz="1500">
+                <a:solidFill>
+                  <a:srgbClr val="22282E"/>
+                </a:solidFill>
+              </a:rPr>
+              <a:t>•  Excepción: desviación aprobada y temporal de una política/estándar. Clave: se documenta, se aprueba y caduca.</a:t>
             </a:r>
           </a:p>
         </p:txBody>
@@ -4748,7 +5124,7 @@
                   <a:srgbClr val="0B3D2E"/>
                 </a:solidFill>
               </a:rPr>
-              <a:t>📝 Reto verificable</a:t>
+              <a:t>🧰 Herramientas y preparación</a:t>
             </a:r>
           </a:p>
         </p:txBody>
@@ -4786,22 +5162,52 @@
                   <a:srgbClr val="22282E"/>
                 </a:solidFill>
               </a:rPr>
-              <a:t>•  Entrega un paquete documental de control de acceso con los cuatro niveles (política, estándar, baseline y procedimiento) coherentes entre sí, cada uno con metadatos completos, más una tabla de trazabilidad a riesgo y regulación y una solicitud de excepción de ejemplo.</a:t>
-            </a:r>
-          </a:p>
-          <a:p>
-            <a:pPr>
-              <a:spcAft>
-                <a:spcPts val="600"/>
-              </a:spcAft>
-            </a:pPr>
-            <a:r>
-              <a:rPr sz="1500">
-                <a:solidFill>
-                  <a:srgbClr val="22282E"/>
-                </a:solidFill>
-              </a:rPr>
-              <a:t>•  Criterio de aceptación: la política no contiene detalles técnicos de "cómo" (esos van en estándar/procedimiento), cada estándar es verificable, el procedimiento es reproducible por un tercero, y todo documento tiene propietario y fecha de revisión.</a:t>
+              <a:t>•  Editor Markdown o procesador de texto con control de cambios.</a:t>
+            </a:r>
+          </a:p>
+          <a:p>
+            <a:pPr>
+              <a:spcAft>
+                <a:spcPts val="600"/>
+              </a:spcAft>
+            </a:pPr>
+            <a:r>
+              <a:rPr sz="1500">
+                <a:solidFill>
+                  <a:srgbClr val="22282E"/>
+                </a:solidFill>
+              </a:rPr>
+              <a:t>•  Un sistema de versionado (Git, o el control de versiones de la wiki corporativa).</a:t>
+            </a:r>
+          </a:p>
+          <a:p>
+            <a:pPr>
+              <a:spcAft>
+                <a:spcPts val="600"/>
+              </a:spcAft>
+            </a:pPr>
+            <a:r>
+              <a:rPr sz="1500">
+                <a:solidFill>
+                  <a:srgbClr val="22282E"/>
+                </a:solidFill>
+              </a:rPr>
+              <a:t>•  Referencias de estructura: SANS Security Policy Templates y NIST SP 800-12/800-100 como inspiración de forma (no copies contenido).</a:t>
+            </a:r>
+          </a:p>
+          <a:p>
+            <a:pPr>
+              <a:spcAft>
+                <a:spcPts val="600"/>
+              </a:spcAft>
+            </a:pPr>
+            <a:r>
+              <a:rPr sz="1500">
+                <a:solidFill>
+                  <a:srgbClr val="22282E"/>
+                </a:solidFill>
+              </a:rPr>
+              <a:t>•  Una plantilla de metadatos: título, versión, propietario, fecha de aprobación, próxima revisión, clasificación.</a:t>
             </a:r>
           </a:p>
         </p:txBody>
